--- a/docs/reports/台灣產業趨勢監測週報_2026-08-17_2026-08-24.pptx
+++ b/docs/reports/台灣產業趨勢監測週報_2026-08-17_2026-08-24.pptx
@@ -183,37 +183,37 @@
                 <c:formatCode>General</c:formatCode>
                 <c:ptCount val="11"/>
                 <c:pt idx="0">
-                  <c:v>46</c:v>
+                  <c:v>49</c:v>
                 </c:pt>
                 <c:pt idx="1">
-                  <c:v>118</c:v>
+                  <c:v>119</c:v>
                 </c:pt>
                 <c:pt idx="2">
-                  <c:v>191</c:v>
+                  <c:v>195</c:v>
                 </c:pt>
                 <c:pt idx="3">
-                  <c:v>222</c:v>
+                  <c:v>231</c:v>
                 </c:pt>
                 <c:pt idx="4">
-                  <c:v>244</c:v>
+                  <c:v>248</c:v>
                 </c:pt>
                 <c:pt idx="5">
-                  <c:v>292</c:v>
+                  <c:v>300</c:v>
                 </c:pt>
                 <c:pt idx="6">
-                  <c:v>309</c:v>
+                  <c:v>318</c:v>
                 </c:pt>
                 <c:pt idx="7">
-                  <c:v>376</c:v>
+                  <c:v>389</c:v>
                 </c:pt>
                 <c:pt idx="8">
-                  <c:v>833</c:v>
+                  <c:v>856</c:v>
                 </c:pt>
                 <c:pt idx="9">
-                  <c:v>849</c:v>
+                  <c:v>871</c:v>
                 </c:pt>
                 <c:pt idx="10">
-                  <c:v>1140</c:v>
+                  <c:v>1184</c:v>
                 </c:pt>
               </c:numCache>
             </c:numRef>
@@ -538,16 +538,16 @@
                 <c:formatCode>General</c:formatCode>
                 <c:ptCount val="6"/>
                 <c:pt idx="0">
-                  <c:v>185</c:v>
+                  <c:v>187</c:v>
                 </c:pt>
                 <c:pt idx="1">
-                  <c:v>103</c:v>
+                  <c:v>108</c:v>
                 </c:pt>
                 <c:pt idx="2">
-                  <c:v>53</c:v>
+                  <c:v>54</c:v>
                 </c:pt>
                 <c:pt idx="3">
-                  <c:v>44</c:v>
+                  <c:v>45</c:v>
                 </c:pt>
                 <c:pt idx="4">
                   <c:v>36</c:v>
@@ -3705,7 +3705,7 @@
           </a:p>
           <a:p>
             <a:r>
-              <a:t>產出:2026-08-24 10:22(台北時間)</a:t>
+              <a:t>產出:2026-08-24 12:58(台北時間)</a:t>
             </a:r>
           </a:p>
           <a:p>
@@ -3773,7 +3773,7 @@
               <a:defRPr sz="1600"/>
             </a:pPr>
             <a:r>
-              <a:t>本期共蒐集 8901 篇公開報導,可歸類 4620 篇</a:t>
+              <a:t>本期共蒐集 9183 篇公開報導,可歸類 4760 篇</a:t>
             </a:r>
           </a:p>
           <a:p>
@@ -3781,7 +3781,7 @@
               <a:defRPr sz="1600"/>
             </a:pPr>
             <a:r>
-              <a:t>政府教育單位:1140 篇(佔可歸類 24.7%)</a:t>
+              <a:t>政府教育單位:1184 篇(佔可歸類 24.9%)</a:t>
             </a:r>
           </a:p>
           <a:p>
@@ -3789,7 +3789,7 @@
               <a:defRPr sz="1600"/>
             </a:pPr>
             <a:r>
-              <a:t>高科技製造業:849 篇(佔可歸類 18.4%)</a:t>
+              <a:t>高科技製造業:871 篇(佔可歸類 18.3%)</a:t>
             </a:r>
           </a:p>
           <a:p>
@@ -3797,7 +3797,7 @@
               <a:defRPr sz="1600"/>
             </a:pPr>
             <a:r>
-              <a:t>金融業:833 篇(佔可歸類 18.0%)</a:t>
+              <a:t>金融業:856 篇(佔可歸類 18.0%)</a:t>
             </a:r>
           </a:p>
           <a:p>
@@ -3805,7 +3805,7 @@
               <a:defRPr sz="1600"/>
             </a:pPr>
             <a:r>
-              <a:t>最熱主題:AI 與自動化(992 篇)、利率與資金環境(414 篇)、地緣政治與供應鏈(244 篇)</a:t>
+              <a:t>最熱主題:AI 與自動化(1023 篇)、利率與資金環境(425 篇)、地緣政治與供應鏈(251 篇)</a:t>
             </a:r>
           </a:p>
           <a:p>
@@ -3966,7 +3966,7 @@
           <a:lstStyle/>
           <a:p>
             <a:r>
-              <a:t>競品聲量對比(SOV)— 半導體(合計 442 篇)</a:t>
+              <a:t>競品聲量對比(SOV)— 半導體(合計 451 篇)</a:t>
             </a:r>
           </a:p>
         </p:txBody>

--- a/docs/reports/台灣產業趨勢監測週報_2026-08-17_2026-08-24.pptx
+++ b/docs/reports/台灣產業趨勢監測週報_2026-08-17_2026-08-24.pptx
@@ -186,34 +186,34 @@
                   <c:v>49</c:v>
                 </c:pt>
                 <c:pt idx="1">
-                  <c:v>119</c:v>
+                  <c:v>123</c:v>
                 </c:pt>
                 <c:pt idx="2">
-                  <c:v>195</c:v>
+                  <c:v>197</c:v>
                 </c:pt>
                 <c:pt idx="3">
-                  <c:v>231</c:v>
+                  <c:v>235</c:v>
                 </c:pt>
                 <c:pt idx="4">
-                  <c:v>248</c:v>
+                  <c:v>251</c:v>
                 </c:pt>
                 <c:pt idx="5">
-                  <c:v>300</c:v>
+                  <c:v>307</c:v>
                 </c:pt>
                 <c:pt idx="6">
-                  <c:v>318</c:v>
+                  <c:v>324</c:v>
                 </c:pt>
                 <c:pt idx="7">
-                  <c:v>389</c:v>
+                  <c:v>401</c:v>
                 </c:pt>
                 <c:pt idx="8">
-                  <c:v>856</c:v>
+                  <c:v>875</c:v>
                 </c:pt>
                 <c:pt idx="9">
-                  <c:v>871</c:v>
+                  <c:v>883</c:v>
                 </c:pt>
                 <c:pt idx="10">
-                  <c:v>1184</c:v>
+                  <c:v>1216</c:v>
                 </c:pt>
               </c:numCache>
             </c:numRef>
@@ -332,10 +332,10 @@
                   <c:v>23</c:v>
                 </c:pt>
                 <c:pt idx="1">
+                  <c:v>15</c:v>
+                </c:pt>
+                <c:pt idx="2">
                   <c:v>14</c:v>
-                </c:pt>
-                <c:pt idx="2">
-                  <c:v>13</c:v>
                 </c:pt>
                 <c:pt idx="3">
                   <c:v>10</c:v>
@@ -538,19 +538,19 @@
                 <c:formatCode>General</c:formatCode>
                 <c:ptCount val="6"/>
                 <c:pt idx="0">
-                  <c:v>187</c:v>
+                  <c:v>191</c:v>
                 </c:pt>
                 <c:pt idx="1">
-                  <c:v>108</c:v>
+                  <c:v>111</c:v>
                 </c:pt>
                 <c:pt idx="2">
-                  <c:v>54</c:v>
+                  <c:v>56</c:v>
                 </c:pt>
                 <c:pt idx="3">
-                  <c:v>45</c:v>
+                  <c:v>46</c:v>
                 </c:pt>
                 <c:pt idx="4">
-                  <c:v>36</c:v>
+                  <c:v>38</c:v>
                 </c:pt>
                 <c:pt idx="5">
                   <c:v>21</c:v>
@@ -3705,7 +3705,7 @@
           </a:p>
           <a:p>
             <a:r>
-              <a:t>產出:2026-08-24 12:58(台北時間)</a:t>
+              <a:t>產出:2026-08-24 14:08(台北時間)</a:t>
             </a:r>
           </a:p>
           <a:p>
@@ -3773,7 +3773,7 @@
               <a:defRPr sz="1600"/>
             </a:pPr>
             <a:r>
-              <a:t>本期共蒐集 9183 篇公開報導,可歸類 4760 篇</a:t>
+              <a:t>本期共蒐集 9371 篇公開報導,可歸類 4861 篇</a:t>
             </a:r>
           </a:p>
           <a:p>
@@ -3781,7 +3781,7 @@
               <a:defRPr sz="1600"/>
             </a:pPr>
             <a:r>
-              <a:t>政府教育單位:1184 篇(佔可歸類 24.9%)</a:t>
+              <a:t>政府教育單位:1216 篇(佔可歸類 25.0%)</a:t>
             </a:r>
           </a:p>
           <a:p>
@@ -3789,7 +3789,7 @@
               <a:defRPr sz="1600"/>
             </a:pPr>
             <a:r>
-              <a:t>高科技製造業:871 篇(佔可歸類 18.3%)</a:t>
+              <a:t>高科技製造業:883 篇(佔可歸類 18.2%)</a:t>
             </a:r>
           </a:p>
           <a:p>
@@ -3797,7 +3797,7 @@
               <a:defRPr sz="1600"/>
             </a:pPr>
             <a:r>
-              <a:t>金融業:856 篇(佔可歸類 18.0%)</a:t>
+              <a:t>金融業:875 篇(佔可歸類 18.0%)</a:t>
             </a:r>
           </a:p>
           <a:p>
@@ -3805,7 +3805,7 @@
               <a:defRPr sz="1600"/>
             </a:pPr>
             <a:r>
-              <a:t>最熱主題:AI 與自動化(1023 篇)、利率與資金環境(425 篇)、地緣政治與供應鏈(251 篇)</a:t>
+              <a:t>最熱主題:AI 與自動化(1036 篇)、利率與資金環境(440 篇)、地緣政治與供應鏈(259 篇)</a:t>
             </a:r>
           </a:p>
           <a:p>
@@ -3909,7 +3909,7 @@
           <a:lstStyle/>
           <a:p>
             <a:r>
-              <a:t>競品聲量對比(SOV)— 電腦品牌(合計 75 篇)</a:t>
+              <a:t>競品聲量對比(SOV)— 電腦品牌(合計 77 篇)</a:t>
             </a:r>
           </a:p>
         </p:txBody>
@@ -3966,7 +3966,7 @@
           <a:lstStyle/>
           <a:p>
             <a:r>
-              <a:t>競品聲量對比(SOV)— 半導體(合計 451 篇)</a:t>
+              <a:t>競品聲量對比(SOV)— 半導體(合計 463 篇)</a:t>
             </a:r>
           </a:p>
         </p:txBody>
@@ -4047,7 +4047,7 @@
               <a:defRPr sz="1600"/>
             </a:pPr>
             <a:r>
-              <a:t>Meta:疑似負面 9 篇(命中:求償、破產、裁罰、詐騙)</a:t>
+              <a:t>Meta:疑似負面 10 篇(命中:求償、破產、裁罰、詐騙)</a:t>
             </a:r>
           </a:p>
           <a:p>

--- a/docs/reports/台灣產業趨勢監測週報_2026-08-17_2026-08-24.pptx
+++ b/docs/reports/台灣產業趨勢監測週報_2026-08-17_2026-08-24.pptx
@@ -186,34 +186,34 @@
                   <c:v>49</c:v>
                 </c:pt>
                 <c:pt idx="1">
-                  <c:v>123</c:v>
+                  <c:v>124</c:v>
                 </c:pt>
                 <c:pt idx="2">
-                  <c:v>197</c:v>
+                  <c:v>204</c:v>
                 </c:pt>
                 <c:pt idx="3">
-                  <c:v>235</c:v>
+                  <c:v>242</c:v>
                 </c:pt>
                 <c:pt idx="4">
-                  <c:v>251</c:v>
+                  <c:v>258</c:v>
                 </c:pt>
                 <c:pt idx="5">
-                  <c:v>307</c:v>
+                  <c:v>319</c:v>
                 </c:pt>
                 <c:pt idx="6">
-                  <c:v>324</c:v>
+                  <c:v>346</c:v>
                 </c:pt>
                 <c:pt idx="7">
-                  <c:v>401</c:v>
+                  <c:v>415</c:v>
                 </c:pt>
                 <c:pt idx="8">
-                  <c:v>875</c:v>
+                  <c:v>913</c:v>
                 </c:pt>
                 <c:pt idx="9">
-                  <c:v>883</c:v>
+                  <c:v>924</c:v>
                 </c:pt>
                 <c:pt idx="10">
-                  <c:v>1216</c:v>
+                  <c:v>1268</c:v>
                 </c:pt>
               </c:numCache>
             </c:numRef>
@@ -308,10 +308,10 @@
                   <c:v>宏碁</c:v>
                 </c:pt>
                 <c:pt idx="3">
+                  <c:v>微星</c:v>
+                </c:pt>
+                <c:pt idx="4">
                   <c:v>聯想</c:v>
-                </c:pt>
-                <c:pt idx="4">
-                  <c:v>微星</c:v>
                 </c:pt>
                 <c:pt idx="5">
                   <c:v>HP</c:v>
@@ -329,10 +329,10 @@
                 <c:formatCode>General</c:formatCode>
                 <c:ptCount val="7"/>
                 <c:pt idx="0">
-                  <c:v>23</c:v>
+                  <c:v>24</c:v>
                 </c:pt>
                 <c:pt idx="1">
-                  <c:v>15</c:v>
+                  <c:v>16</c:v>
                 </c:pt>
                 <c:pt idx="2">
                   <c:v>14</c:v>
@@ -341,10 +341,10 @@
                   <c:v>10</c:v>
                 </c:pt>
                 <c:pt idx="4">
-                  <c:v>9</c:v>
+                  <c:v>10</c:v>
                 </c:pt>
                 <c:pt idx="5">
-                  <c:v>5</c:v>
+                  <c:v>6</c:v>
                 </c:pt>
                 <c:pt idx="6">
                   <c:v>1</c:v>
@@ -382,10 +382,10 @@
                   <c:v>宏碁</c:v>
                 </c:pt>
                 <c:pt idx="3">
+                  <c:v>微星</c:v>
+                </c:pt>
+                <c:pt idx="4">
                   <c:v>聯想</c:v>
-                </c:pt>
-                <c:pt idx="4">
-                  <c:v>微星</c:v>
                 </c:pt>
                 <c:pt idx="5">
                   <c:v>HP</c:v>
@@ -412,10 +412,10 @@
                   <c:v>30</c:v>
                 </c:pt>
                 <c:pt idx="3">
+                  <c:v>7</c:v>
+                </c:pt>
+                <c:pt idx="4">
                   <c:v>6</c:v>
-                </c:pt>
-                <c:pt idx="4">
-                  <c:v>7</c:v>
                 </c:pt>
                 <c:pt idx="5">
                   <c:v>4</c:v>
@@ -538,19 +538,19 @@
                 <c:formatCode>General</c:formatCode>
                 <c:ptCount val="6"/>
                 <c:pt idx="0">
-                  <c:v>191</c:v>
+                  <c:v>204</c:v>
                 </c:pt>
                 <c:pt idx="1">
-                  <c:v>111</c:v>
+                  <c:v>118</c:v>
                 </c:pt>
                 <c:pt idx="2">
-                  <c:v>56</c:v>
+                  <c:v>58</c:v>
                 </c:pt>
                 <c:pt idx="3">
-                  <c:v>46</c:v>
+                  <c:v>47</c:v>
                 </c:pt>
                 <c:pt idx="4">
-                  <c:v>38</c:v>
+                  <c:v>39</c:v>
                 </c:pt>
                 <c:pt idx="5">
                   <c:v>21</c:v>
@@ -3705,7 +3705,7 @@
           </a:p>
           <a:p>
             <a:r>
-              <a:t>產出:2026-08-24 14:08(台北時間)</a:t>
+              <a:t>產出:2026-08-24 18:17(台北時間)</a:t>
             </a:r>
           </a:p>
           <a:p>
@@ -3773,7 +3773,7 @@
               <a:defRPr sz="1600"/>
             </a:pPr>
             <a:r>
-              <a:t>本期共蒐集 9371 篇公開報導,可歸類 4861 篇</a:t>
+              <a:t>本期共蒐集 9734 篇公開報導,可歸類 5062 篇</a:t>
             </a:r>
           </a:p>
           <a:p>
@@ -3781,7 +3781,7 @@
               <a:defRPr sz="1600"/>
             </a:pPr>
             <a:r>
-              <a:t>政府教育單位:1216 篇(佔可歸類 25.0%)</a:t>
+              <a:t>政府教育單位:1268 篇(佔可歸類 25.0%)</a:t>
             </a:r>
           </a:p>
           <a:p>
@@ -3789,7 +3789,7 @@
               <a:defRPr sz="1600"/>
             </a:pPr>
             <a:r>
-              <a:t>高科技製造業:883 篇(佔可歸類 18.2%)</a:t>
+              <a:t>高科技製造業:924 篇(佔可歸類 18.3%)</a:t>
             </a:r>
           </a:p>
           <a:p>
@@ -3797,7 +3797,7 @@
               <a:defRPr sz="1600"/>
             </a:pPr>
             <a:r>
-              <a:t>金融業:875 篇(佔可歸類 18.0%)</a:t>
+              <a:t>金融業:913 篇(佔可歸類 18.0%)</a:t>
             </a:r>
           </a:p>
           <a:p>
@@ -3805,7 +3805,7 @@
               <a:defRPr sz="1600"/>
             </a:pPr>
             <a:r>
-              <a:t>最熱主題:AI 與自動化(1036 篇)、利率與資金環境(440 篇)、地緣政治與供應鏈(259 篇)</a:t>
+              <a:t>最熱主題:AI 與自動化(1086 篇)、利率與資金環境(455 篇)、地緣政治與供應鏈(265 篇)</a:t>
             </a:r>
           </a:p>
           <a:p>
@@ -3909,7 +3909,7 @@
           <a:lstStyle/>
           <a:p>
             <a:r>
-              <a:t>競品聲量對比(SOV)— 電腦品牌(合計 77 篇)</a:t>
+              <a:t>競品聲量對比(SOV)— 電腦品牌(合計 81 篇)</a:t>
             </a:r>
           </a:p>
         </p:txBody>
@@ -3966,7 +3966,7 @@
           <a:lstStyle/>
           <a:p>
             <a:r>
-              <a:t>競品聲量對比(SOV)— 半導體(合計 463 篇)</a:t>
+              <a:t>競品聲量對比(SOV)— 半導體(合計 487 篇)</a:t>
             </a:r>
           </a:p>
         </p:txBody>
@@ -4055,7 +4055,7 @@
               <a:defRPr sz="1600"/>
             </a:pPr>
             <a:r>
-              <a:t>超微:疑似負面 4 篇(命中:起訴)</a:t>
+              <a:t>超微:疑似負面 5 篇(命中:起訴)</a:t>
             </a:r>
           </a:p>
           <a:p>
@@ -4071,7 +4071,7 @@
               <a:defRPr sz="1600"/>
             </a:pPr>
             <a:r>
-              <a:t>台積電:疑似負面 3 篇(命中:停工、工安)</a:t>
+              <a:t>輝達:疑似負面 3 篇(命中:瑕疵、起訴)</a:t>
             </a:r>
           </a:p>
           <a:p>
@@ -4079,7 +4079,7 @@
               <a:defRPr sz="1600"/>
             </a:pPr>
             <a:r>
-              <a:t>輝達:疑似負面 2 篇(命中:瑕疵)</a:t>
+              <a:t>台積電:疑似負面 3 篇(命中:停工、工安)</a:t>
             </a:r>
           </a:p>
           <a:p>
@@ -4095,7 +4095,7 @@
               <a:defRPr sz="1600"/>
             </a:pPr>
             <a:r>
-              <a:t>Uber:疑似負面 1 篇(命中:裁罰)</a:t>
+              <a:t>中信金:疑似負面 1 篇(命中:詐騙)</a:t>
             </a:r>
           </a:p>
           <a:p>
@@ -4103,7 +4103,7 @@
               <a:defRPr sz="1600"/>
             </a:pPr>
             <a:r>
-              <a:t>聯發科:疑似負面 1 篇(命中:求償)</a:t>
+              <a:t>玉山金:疑似負面 1 篇(命中:詐騙)</a:t>
             </a:r>
           </a:p>
           <a:p>
